--- a/public/AquaSentinel_NOVA2026_PitchDeck.pptx
+++ b/public/AquaSentinel_NOVA2026_PitchDeck.pptx
@@ -6641,7 +6641,7 @@
                   <a:srgbClr val="64748B"/>
                 </a:solidFill>
               </a:rPr>
-              <a:t>A clear path from hackathon prototype to maritime fleet integration.</a:t>
+              <a:t>A clear path from engineering prototype to maritime fleet integration.</a:t>
             </a:r>
             <a:endParaRPr lang="en-US" sz="1250" dirty="0"/>
           </a:p>
